--- a/slides/build/aula-04-servidor-docker-kamal-e-deploy.pptx
+++ b/slides/build/aula-04-servidor-docker-kamal-e-deploy.pptx
@@ -8248,7 +8248,7 @@
                 <a:cs typeface="Open Sans Extra Bold"/>
                 <a:sym typeface="Open Sans Extra Bold"/>
               </a:rPr>
-              <a:t>PRÁTICA 1 — SUBIR A VM E ENTRAR NELA</a:t>
+              <a:t>PRÁTICA 1: SUBIR A VM E ENTRAR NELA</a:t>
             </a:r>
           </a:p>
         </p:txBody>
@@ -11579,7 +11579,7 @@
                 <a:cs typeface="Open Sans Extra Bold"/>
                 <a:sym typeface="Open Sans Extra Bold"/>
               </a:rPr>
-              <a:t>PRÁTICA 2 — FIREWALL, DOCKER, SWAP, SSH</a:t>
+              <a:t>PRÁTICA 2: FIREWALL, DOCKER, SWAP, SSH</a:t>
             </a:r>
           </a:p>
         </p:txBody>
@@ -13950,7 +13950,7 @@
                 <a:cs typeface="Open Sans Extra Bold"/>
                 <a:sym typeface="Open Sans Extra Bold"/>
               </a:rPr>
-              <a:t>PRÁTICA 3 — ARQUIVOS DE DEPLOY E O TOKEN</a:t>
+              <a:t>PRÁTICA 3: ARQUIVOS DE DEPLOY E O TOKEN</a:t>
             </a:r>
           </a:p>
         </p:txBody>
@@ -14723,7 +14723,7 @@
                 <a:cs typeface="Open Sans Extra Bold"/>
                 <a:sym typeface="Open Sans Extra Bold"/>
               </a:rPr>
-              <a:t>DEPLOY.YML — SERVIDOR E IMAGEM</a:t>
+              <a:t>DEPLOY.YML: SERVIDOR E IMAGEM</a:t>
             </a:r>
           </a:p>
         </p:txBody>
@@ -15151,7 +15151,7 @@
                 <a:cs typeface="Open Sans Extra Bold"/>
                 <a:sym typeface="Open Sans Extra Bold"/>
               </a:rPr>
-              <a:t>DEPLOY.YML — ENV</a:t>
+              <a:t>DEPLOY.YML: ENV</a:t>
             </a:r>
           </a:p>
         </p:txBody>
@@ -17342,7 +17342,7 @@
                 <a:cs typeface="Open Sans Extra Bold"/>
                 <a:sym typeface="Open Sans Extra Bold"/>
               </a:rPr>
-              <a:t>PRÁTICA 4 — O .ENV</a:t>
+              <a:t>PRÁTICA 4: O .ENV</a:t>
             </a:r>
           </a:p>
         </p:txBody>
@@ -20277,7 +20277,7 @@
                 <a:cs typeface="Open Sans Extra Bold"/>
                 <a:sym typeface="Open Sans Extra Bold"/>
               </a:rPr>
-              <a:t>PRÁTICA 5 — CERTIFICADO E /ETC/HOSTS</a:t>
+              <a:t>PRÁTICA 5: CERTIFICADO E /ETC/HOSTS</a:t>
             </a:r>
           </a:p>
         </p:txBody>
@@ -22419,7 +22419,7 @@
                 <a:cs typeface="Open Sans Extra Bold"/>
                 <a:sym typeface="Open Sans Extra Bold"/>
               </a:rPr>
-              <a:t>PRÁTICA 6 — O PRIMEIRO DEPLOY</a:t>
+              <a:t>PRÁTICA 6: O PRIMEIRO DEPLOY</a:t>
             </a:r>
           </a:p>
         </p:txBody>
@@ -22697,7 +22697,7 @@
                 <a:cs typeface="Open Sans Extra Bold"/>
                 <a:sym typeface="Open Sans Extra Bold"/>
               </a:rPr>
-              <a:t>PRÁTICA 7 — O CERTIFICADO, COM OS OLHOS</a:t>
+              <a:t>PRÁTICA 7: O CERTIFICADO, COM OS OLHOS</a:t>
             </a:r>
           </a:p>
         </p:txBody>
@@ -24149,7 +24149,7 @@
                 <a:cs typeface="Open Sans Extra Bold"/>
                 <a:sym typeface="Open Sans Extra Bold"/>
               </a:rPr>
-              <a:t>PRÁTICA 8 — O SISTEMA INTEIRO, E O BACKUP</a:t>
+              <a:t>PRÁTICA 8: O SISTEMA INTEIRO, E O BACKUP</a:t>
             </a:r>
           </a:p>
         </p:txBody>

--- a/slides/build/aula-04-servidor-docker-kamal-e-deploy.pptx
+++ b/slides/build/aula-04-servidor-docker-kamal-e-deploy.pptx
@@ -8468,13 +8468,13 @@
           <a:p>
             <a:pPr algn="l" marL="1071776" indent="-535888" lvl="1">
               <a:lnSpc>
-                <a:spcPts val="4169"/>
+                <a:spcPts val="3821"/>
               </a:lnSpc>
               <a:buFont typeface="Arial"/>
               <a:buChar char="•"/>
             </a:pPr>
             <a:r>
-              <a:rPr lang="en-US" b="true" sz="2978">
+              <a:rPr lang="en-US" b="true" sz="2730">
                 <a:solidFill>
                   <a:srgbClr val="012B67"/>
                 </a:solidFill>
@@ -8483,19 +8483,19 @@
                 <a:cs typeface="Open Sans Extra Bold"/>
                 <a:sym typeface="Open Sans Extra Bold"/>
               </a:rPr>
-              <a:t>Subir o seu próprio servidor Linux, do zero.</a:t>
+              <a:t>Transformar a sua máquina num servidor: SSH, chave, e entrar nela.</a:t>
             </a:r>
           </a:p>
           <a:p>
             <a:pPr algn="l" marL="1071776" indent="-535888" lvl="1">
               <a:lnSpc>
-                <a:spcPts val="4169"/>
+                <a:spcPts val="3821"/>
               </a:lnSpc>
               <a:buFont typeface="Arial"/>
               <a:buChar char="•"/>
             </a:pPr>
             <a:r>
-              <a:rPr lang="en-US" b="true" sz="2978">
+              <a:rPr lang="en-US" b="true" sz="2730">
                 <a:solidFill>
                   <a:srgbClr val="012B67"/>
                 </a:solidFill>
@@ -8504,19 +8504,19 @@
                 <a:cs typeface="Open Sans Extra Bold"/>
                 <a:sym typeface="Open Sans Extra Bold"/>
               </a:rPr>
-              <a:t>Entrar nele por SSH, com chave. E fechá-lo.</a:t>
+              <a:t>Empacotar a API numa imagem Docker, e publicá-la num registry.</a:t>
             </a:r>
           </a:p>
           <a:p>
             <a:pPr algn="l" marL="1071776" indent="-535888" lvl="1">
               <a:lnSpc>
-                <a:spcPts val="4169"/>
+                <a:spcPts val="3821"/>
               </a:lnSpc>
               <a:buFont typeface="Arial"/>
               <a:buChar char="•"/>
             </a:pPr>
             <a:r>
-              <a:rPr lang="en-US" b="true" sz="2978">
+              <a:rPr lang="en-US" b="true" sz="2730">
                 <a:solidFill>
                   <a:srgbClr val="012B67"/>
                 </a:solidFill>
@@ -8525,19 +8525,19 @@
                 <a:cs typeface="Open Sans Extra Bold"/>
                 <a:sym typeface="Open Sans Extra Bold"/>
               </a:rPr>
-              <a:t>Entender Docker e Kamal de verdade.</a:t>
+              <a:t>Entender o Kamal: zero-downtime, rollback e segredo.</a:t>
             </a:r>
           </a:p>
           <a:p>
             <a:pPr algn="l" marL="1071776" indent="-535888" lvl="1">
               <a:lnSpc>
-                <a:spcPts val="4169"/>
+                <a:spcPts val="3821"/>
               </a:lnSpc>
               <a:buFont typeface="Arial"/>
               <a:buChar char="•"/>
             </a:pPr>
             <a:r>
-              <a:rPr lang="en-US" b="true" sz="2978">
+              <a:rPr lang="en-US" b="true" sz="2730">
                 <a:solidFill>
                   <a:srgbClr val="012B67"/>
                 </a:solidFill>
@@ -8546,7 +8546,7 @@
                 <a:cs typeface="Open Sans Extra Bold"/>
                 <a:sym typeface="Open Sans Extra Bold"/>
               </a:rPr>
-              <a:t>Colocar a sua API no ar, com HTTPS.</a:t>
+              <a:t>Servir com HTTPS, e ver a diferença entre criptografia e confiança.</a:t>
             </a:r>
           </a:p>
         </p:txBody>
@@ -10572,7 +10572,7 @@
                 <a:cs typeface="Open Sans Extra Bold"/>
                 <a:sym typeface="Open Sans Extra Bold"/>
               </a:rPr>
-              <a:t>Apostila: Prática 3.</a:t>
+              <a:t>Apostila: Prática 2.</a:t>
             </a:r>
           </a:p>
         </p:txBody>
@@ -14130,7 +14130,7 @@
                 <a:cs typeface="Open Sans Extra Bold"/>
                 <a:sym typeface="Open Sans Extra Bold"/>
               </a:rPr>
-              <a:t>Apostila: Prática 4.</a:t>
+              <a:t>Apostila: Prática 3.</a:t>
             </a:r>
           </a:p>
         </p:txBody>
@@ -16962,7 +16962,7 @@
                 <a:cs typeface="Open Sans Extra Bold"/>
                 <a:sym typeface="Open Sans Extra Bold"/>
               </a:rPr>
-              <a:t>Apostila: Prática 5.</a:t>
+              <a:t>Apostila: Prática 4.</a:t>
             </a:r>
           </a:p>
         </p:txBody>
@@ -19104,7 +19104,7 @@
                 <a:cs typeface="Open Sans Extra Bold"/>
                 <a:sym typeface="Open Sans Extra Bold"/>
               </a:rPr>
-              <a:t>Apostila: Prática 6, com a maior tabela de erros da capacitação.</a:t>
+              <a:t>Apostila: Prática 5, com a maior tabela de erros da capacitação.</a:t>
             </a:r>
           </a:p>
         </p:txBody>
@@ -19424,7 +19424,7 @@
                 <a:cs typeface="Open Sans Extra Bold"/>
                 <a:sym typeface="Open Sans Extra Bold"/>
               </a:rPr>
-              <a:t>Apostila: Prática 7.</a:t>
+              <a:t>Apostila: Prática 6.</a:t>
             </a:r>
           </a:p>
         </p:txBody>
@@ -20897,7 +20897,7 @@
                 <a:cs typeface="Open Sans Extra Bold"/>
                 <a:sym typeface="Open Sans Extra Bold"/>
               </a:rPr>
-              <a:t>Apostila: Prática 8.</a:t>
+              <a:t>Apostila: Prática 7.</a:t>
             </a:r>
           </a:p>
         </p:txBody>
@@ -21076,13 +21076,13 @@
           <a:p>
             <a:pPr algn="l" marL="1136378" indent="-568189" lvl="1">
               <a:lnSpc>
-                <a:spcPts val="4573"/>
+                <a:spcPts val="3742"/>
               </a:lnSpc>
               <a:buFont typeface="Arial"/>
               <a:buChar char="•"/>
             </a:pPr>
             <a:r>
-              <a:rPr lang="en-US" sz="2894">
+              <a:rPr lang="en-US" sz="2368">
                 <a:solidFill>
                   <a:srgbClr val="000000"/>
                 </a:solidFill>
@@ -21091,19 +21091,19 @@
                 <a:cs typeface="Open Sans Extra Bold"/>
                 <a:sym typeface="Open Sans Extra Bold"/>
               </a:rPr>
-              <a:t>Servidor no notebook ou em datacenter: muda o IP, não o trabalho.</a:t>
+              <a:t>Publicar não é rodar noutro lugar: é empacotar, versionar e poder voltar atrás.</a:t>
             </a:r>
           </a:p>
           <a:p>
             <a:pPr algn="l" marL="1136378" indent="-568189" lvl="1">
               <a:lnSpc>
-                <a:spcPts val="4573"/>
+                <a:spcPts val="3742"/>
               </a:lnSpc>
               <a:buFont typeface="Arial"/>
               <a:buChar char="•"/>
             </a:pPr>
             <a:r>
-              <a:rPr lang="en-US" sz="2894">
+              <a:rPr lang="en-US" sz="2368">
                 <a:solidFill>
                   <a:srgbClr val="000000"/>
                 </a:solidFill>
@@ -21118,13 +21118,13 @@
           <a:p>
             <a:pPr algn="l" marL="1136378" indent="-568189" lvl="1">
               <a:lnSpc>
-                <a:spcPts val="4573"/>
+                <a:spcPts val="3742"/>
               </a:lnSpc>
               <a:buFont typeface="Arial"/>
               <a:buChar char="•"/>
             </a:pPr>
             <a:r>
-              <a:rPr lang="en-US" sz="2894">
+              <a:rPr lang="en-US" sz="2368">
                 <a:solidFill>
                   <a:srgbClr val="000000"/>
                 </a:solidFill>
@@ -21139,13 +21139,13 @@
           <a:p>
             <a:pPr algn="l" marL="1136378" indent="-568189" lvl="1">
               <a:lnSpc>
-                <a:spcPts val="4573"/>
+                <a:spcPts val="3742"/>
               </a:lnSpc>
               <a:buFont typeface="Arial"/>
               <a:buChar char="•"/>
             </a:pPr>
             <a:r>
-              <a:rPr lang="en-US" sz="2894">
+              <a:rPr lang="en-US" sz="2368">
                 <a:solidFill>
                   <a:srgbClr val="000000"/>
                 </a:solidFill>
@@ -21160,13 +21160,13 @@
           <a:p>
             <a:pPr algn="l" marL="1136378" indent="-568189" lvl="1">
               <a:lnSpc>
-                <a:spcPts val="4573"/>
+                <a:spcPts val="3742"/>
               </a:lnSpc>
               <a:buFont typeface="Arial"/>
               <a:buChar char="•"/>
             </a:pPr>
             <a:r>
-              <a:rPr lang="en-US" sz="2894">
+              <a:rPr lang="en-US" sz="2368">
                 <a:solidFill>
                   <a:srgbClr val="000000"/>
                 </a:solidFill>
@@ -21181,13 +21181,13 @@
           <a:p>
             <a:pPr algn="l" marL="1136378" indent="-568189" lvl="1">
               <a:lnSpc>
-                <a:spcPts val="4573"/>
+                <a:spcPts val="3742"/>
               </a:lnSpc>
               <a:buFont typeface="Arial"/>
               <a:buChar char="•"/>
             </a:pPr>
             <a:r>
-              <a:rPr lang="en-US" sz="2894">
+              <a:rPr lang="en-US" sz="2368">
                 <a:solidFill>
                   <a:srgbClr val="000000"/>
                 </a:solidFill>
@@ -21202,13 +21202,13 @@
           <a:p>
             <a:pPr algn="l" marL="1136378" indent="-568189" lvl="1">
               <a:lnSpc>
-                <a:spcPts val="4573"/>
+                <a:spcPts val="3742"/>
               </a:lnSpc>
               <a:buFont typeface="Arial"/>
               <a:buChar char="•"/>
             </a:pPr>
             <a:r>
-              <a:rPr lang="en-US" sz="2894">
+              <a:rPr lang="en-US" sz="2368">
                 <a:solidFill>
                   <a:srgbClr val="000000"/>
                 </a:solidFill>
@@ -21217,7 +21217,28 @@
                 <a:cs typeface="Open Sans Extra Bold"/>
                 <a:sym typeface="Open Sans Extra Bold"/>
               </a:rPr>
-              <a:t>Numa máquina exposta, firewall e segredo curto deixam de ser detalhe.</a:t>
+              <a:t>CI é o portão: te avisa antes, com ou sem deploy automático.</a:t>
+            </a:r>
+          </a:p>
+          <a:p>
+            <a:pPr algn="l" marL="1136378" indent="-568189" lvl="1">
+              <a:lnSpc>
+                <a:spcPts val="3742"/>
+              </a:lnSpc>
+              <a:buFont typeface="Arial"/>
+              <a:buChar char="•"/>
+            </a:pPr>
+            <a:r>
+              <a:rPr lang="en-US" sz="2368">
+                <a:solidFill>
+                  <a:srgbClr val="000000"/>
+                </a:solidFill>
+                <a:latin typeface="Open Sans Extra Bold"/>
+                <a:ea typeface="Open Sans Extra Bold"/>
+                <a:cs typeface="Open Sans Extra Bold"/>
+                <a:sym typeface="Open Sans Extra Bold"/>
+              </a:rPr>
+              <a:t>Numa máquina exposta, provisionar direito e o firewall deixam de ser detalhe.</a:t>
             </a:r>
           </a:p>
         </p:txBody>

--- a/slides/build/aula-04-servidor-docker-kamal-e-deploy.pptx
+++ b/slides/build/aula-04-servidor-docker-kamal-e-deploy.pptx
@@ -1317,22 +1317,27 @@
           <a:lstStyle/>
           <a:p>
             <a:r>
-              <a:t>~20 minutos. Fecha a capacitação: o que eles construíram nas Aulas 2 e</a:t>
-            </a:r>
-          </a:p>
-          <a:p>
-            <a:r>
-              <a:t>3, rodando em produção.</a:t>
-            </a:r>
-          </a:p>
-          <a:p>
-            <a:r>
-              <a:t>O backup é o fecho honesto da aula: volume não é backup, e aqui a VM</a:t>
-            </a:r>
-          </a:p>
-          <a:p>
-            <a:r>
-              <a:t>some com um multipass delete. Demonstração barata de um susto caro.</a:t>
+              <a:t>Fecha a capacitação: o que eles construíram nas Aulas 2 e 3, rodando em</a:t>
+            </a:r>
+          </a:p>
+          <a:p>
+            <a:r>
+              <a:t>produção.</a:t>
+            </a:r>
+          </a:p>
+          <a:p>
+            <a:r>
+              <a:t>O backup é o fecho honesto da aula. Volume Docker não é backup: um</a:t>
+            </a:r>
+          </a:p>
+          <a:p>
+            <a:r>
+              <a:t>docker volume rm sem querer leva tudo, e backup é a cópia que vive</a:t>
+            </a:r>
+          </a:p>
+          <a:p>
+            <a:r>
+              <a:t>FORA dali. Vale perguntar quem já perdeu alguma coisa assim.</a:t>
             </a:r>
           </a:p>
         </p:txBody>
@@ -9869,7 +9874,7 @@
                 <a:cs typeface="Open Sans Extra Bold"/>
                 <a:sym typeface="Open Sans Extra Bold"/>
               </a:rPr>
-              <a:t>e a VM puxa de lá e roda.</a:t>
+              <a:t>e o servidor puxa de lá e roda.</a:t>
             </a:r>
           </a:p>
           <a:p>
@@ -10962,7 +10967,7 @@
                 <a:cs typeface="Open Sans Extra Bold"/>
                 <a:sym typeface="Open Sans Extra Bold"/>
               </a:rPr>
-              <a:t>Ele conecta na sua VM e roda docker.</a:t>
+              <a:t>Ele conecta na máquina que serve e roda docker.</a:t>
             </a:r>
           </a:p>
           <a:p>
@@ -11499,7 +11504,7 @@
                 </a:solidFill>
                 <a:latin typeface="Consolas"/>
               </a:rPr>
-              <a:t># e o MESMO na VM local e numa VPS. Muda a variável.</a:t>
+              <a:t># e o MESMO na sua máquina e num servidor alugado.</a:t>
             </a:r>
           </a:p>
         </p:txBody>
@@ -11632,13 +11637,13 @@
           <a:p>
             <a:pPr algn="l" marL="1136378" indent="-568189" lvl="1">
               <a:lnSpc>
-                <a:spcPts val="4573"/>
+                <a:spcPts val="4989"/>
               </a:lnSpc>
               <a:buFont typeface="Arial"/>
               <a:buChar char="•"/>
             </a:pPr>
             <a:r>
-              <a:rPr lang="en-US" sz="2894">
+              <a:rPr lang="en-US" sz="3157">
                 <a:solidFill>
                   <a:srgbClr val="000000"/>
                 </a:solidFill>
@@ -11653,13 +11658,13 @@
           <a:p>
             <a:pPr algn="l" marL="1136378" indent="-568189" lvl="1">
               <a:lnSpc>
-                <a:spcPts val="4573"/>
+                <a:spcPts val="4989"/>
               </a:lnSpc>
               <a:buFont typeface="Arial"/>
               <a:buChar char="•"/>
             </a:pPr>
             <a:r>
-              <a:rPr lang="en-US" sz="2894">
+              <a:rPr lang="en-US" sz="3157">
                 <a:solidFill>
                   <a:srgbClr val="000000"/>
                 </a:solidFill>
@@ -11668,19 +11673,19 @@
                 <a:cs typeface="Open Sans Extra Bold"/>
                 <a:sym typeface="Open Sans Extra Bold"/>
               </a:rPr>
-              <a:t>Ela roda na máquina de vocês. Hoje ela SAI de lá.</a:t>
+              <a:t>Ela roda com bin/rails server. Hoje ela vira um sistema publicado.</a:t>
             </a:r>
           </a:p>
           <a:p>
             <a:pPr algn="l" marL="1136378" indent="-568189" lvl="1">
               <a:lnSpc>
-                <a:spcPts val="4573"/>
+                <a:spcPts val="4989"/>
               </a:lnSpc>
               <a:buFont typeface="Arial"/>
               <a:buChar char="•"/>
             </a:pPr>
             <a:r>
-              <a:rPr lang="en-US" sz="2894">
+              <a:rPr lang="en-US" sz="3157">
                 <a:solidFill>
                   <a:srgbClr val="000000"/>
                 </a:solidFill>
@@ -11689,19 +11694,19 @@
                 <a:cs typeface="Open Sans Extra Bold"/>
                 <a:sym typeface="Open Sans Extra Bold"/>
               </a:rPr>
-              <a:t>Hoje é a aula mais diferente das quatro: vocês não escrevem Ruby.</a:t>
+              <a:t>Hoje é a aula mais diferente das quatro: vocês quase não escrevem Ruby.</a:t>
             </a:r>
           </a:p>
           <a:p>
             <a:pPr algn="l" marL="1136378" indent="-568189" lvl="1">
               <a:lnSpc>
-                <a:spcPts val="4573"/>
+                <a:spcPts val="4989"/>
               </a:lnSpc>
               <a:buFont typeface="Arial"/>
               <a:buChar char="•"/>
             </a:pPr>
             <a:r>
-              <a:rPr lang="en-US" sz="2894">
+              <a:rPr lang="en-US" sz="3157">
                 <a:solidFill>
                   <a:srgbClr val="000000"/>
                 </a:solidFill>
@@ -11710,19 +11715,19 @@
                 <a:cs typeface="Open Sans Extra Bold"/>
                 <a:sym typeface="Open Sans Extra Bold"/>
               </a:rPr>
-              <a:t>Vocês operam uma máquina: firewall, Docker, chave SSH, HTTPS.</a:t>
+              <a:t>Vocês operam: chave SSH, imagem Docker, registry, proxy, HTTPS.</a:t>
             </a:r>
           </a:p>
           <a:p>
             <a:pPr algn="l" marL="1136378" indent="-568189" lvl="1">
               <a:lnSpc>
-                <a:spcPts val="4573"/>
+                <a:spcPts val="4989"/>
               </a:lnSpc>
               <a:buFont typeface="Arial"/>
               <a:buChar char="•"/>
             </a:pPr>
             <a:r>
-              <a:rPr lang="en-US" sz="2894">
+              <a:rPr lang="en-US" sz="3157">
                 <a:solidFill>
                   <a:srgbClr val="000000"/>
                 </a:solidFill>
@@ -11737,13 +11742,13 @@
           <a:p>
             <a:pPr algn="l" marL="1136378" indent="-568189" lvl="1">
               <a:lnSpc>
-                <a:spcPts val="4573"/>
+                <a:spcPts val="4989"/>
               </a:lnSpc>
               <a:buFont typeface="Arial"/>
               <a:buChar char="•"/>
             </a:pPr>
             <a:r>
-              <a:rPr lang="en-US" sz="2894">
+              <a:rPr lang="en-US" sz="3157">
                 <a:solidFill>
                   <a:srgbClr val="000000"/>
                 </a:solidFill>
@@ -11752,28 +11757,7 @@
                 <a:cs typeface="Open Sans Extra Bold"/>
                 <a:sym typeface="Open Sans Extra Bold"/>
               </a:rPr>
-              <a:t>E uma dica que resolve metade da confusão: OLHE EM QUAL MÁQUINA VOCÊ ESTÁ.</a:t>
-            </a:r>
-          </a:p>
-          <a:p>
-            <a:pPr algn="l" marL="2272757" indent="-757586" lvl="2">
-              <a:lnSpc>
-                <a:spcPts val="4573"/>
-              </a:lnSpc>
-              <a:buFont typeface="Arial"/>
-              <a:buChar char="◦"/>
-            </a:pPr>
-            <a:r>
-              <a:rPr lang="en-US" sz="2894">
-                <a:solidFill>
-                  <a:srgbClr val="000000"/>
-                </a:solidFill>
-                <a:latin typeface="Open Sans Extra Bold"/>
-                <a:ea typeface="Open Sans Extra Bold"/>
-                <a:cs typeface="Open Sans Extra Bold"/>
-                <a:sym typeface="Open Sans Extra Bold"/>
-              </a:rPr>
-              <a:t>o prompt diz: voce@notebook ou ubuntu@servidor</a:t>
+              <a:t>E cada ferramenta vem com o problema que ela resolve, na ordem.</a:t>
             </a:r>
           </a:p>
         </p:txBody>
@@ -14046,7 +14030,7 @@
                 <a:cs typeface="Open Sans Extra Bold"/>
                 <a:sym typeface="Open Sans Extra Bold"/>
               </a:rPr>
-              <a:t>SERVER_ARCH: rode uname -m e traduza (x86_64 = amd64, aarch64 = arm64).</a:t>
+              <a:t>SERVER_ARCH: o uname -m da prática anterior (x86_64 = amd64, aarch64 = arm64).</a:t>
             </a:r>
           </a:p>
           <a:p>
@@ -15529,7 +15513,7 @@
                 <a:cs typeface="Open Sans Extra Bold"/>
                 <a:sym typeface="Open Sans Extra Bold"/>
               </a:rPr>
-              <a:t>É o kamal-proxy, rodando na sua VM.</a:t>
+              <a:t>É o kamal-proxy, rodando na máquina que serve.</a:t>
             </a:r>
           </a:p>
           <a:p>
@@ -16494,7 +16478,7 @@
         <p:spPr>
           <a:xfrm>
             <a:off x="2926080" y="2377440"/>
-            <a:ext cx="12435840" cy="4596525"/>
+            <a:ext cx="12435840" cy="4659418"/>
           </a:xfrm>
           <a:prstGeom prst="roundRect">
             <a:avLst>
@@ -16540,7 +16524,7 @@
         <p:spPr>
           <a:xfrm>
             <a:off x="3383280" y="2743200"/>
-            <a:ext cx="11521440" cy="3865005"/>
+            <a:ext cx="11521440" cy="3927898"/>
           </a:xfrm>
           <a:prstGeom prst="rect">
             <a:avLst/>
@@ -16559,7 +16543,7 @@
               </a:lnSpc>
             </a:pPr>
             <a:r>
-              <a:rPr sz="2049">
+              <a:rPr sz="2083">
                 <a:solidFill>
                   <a:srgbClr val="E6EAF2"/>
                 </a:solidFill>
@@ -16575,13 +16559,13 @@
               </a:lnSpc>
             </a:pPr>
             <a:r>
-              <a:rPr sz="2049">
+              <a:rPr sz="2083">
                 <a:solidFill>
                   <a:srgbClr val="E6EAF2"/>
                 </a:solidFill>
                 <a:latin typeface="Consolas"/>
               </a:rPr>
-              <a:t># curl: (60) SSL certificate problem: self signed certificate</a:t>
+              <a:t># curl: (60) ... self-signed certificate</a:t>
             </a:r>
           </a:p>
           <a:p>
@@ -16591,7 +16575,7 @@
               </a:lnSpc>
             </a:pPr>
             <a:r>
-              <a:rPr sz="2049">
+              <a:rPr sz="2083">
                 <a:solidFill>
                   <a:srgbClr val="E6EAF2"/>
                 </a:solidFill>
@@ -16607,7 +16591,7 @@
               </a:lnSpc>
             </a:pPr>
             <a:r>
-              <a:rPr sz="2049">
+              <a:rPr sz="2083">
                 <a:solidFill>
                   <a:srgbClr val="E6EAF2"/>
                 </a:solidFill>
@@ -16623,7 +16607,7 @@
               </a:lnSpc>
             </a:pPr>
             <a:r>
-              <a:rPr sz="2049">
+              <a:rPr sz="2083">
                 <a:solidFill>
                   <a:srgbClr val="E6EAF2"/>
                 </a:solidFill>
@@ -16639,7 +16623,7 @@
               </a:lnSpc>
             </a:pPr>
             <a:r>
-              <a:rPr sz="2049">
+              <a:rPr sz="2083">
                 <a:solidFill>
                   <a:srgbClr val="E6EAF2"/>
                 </a:solidFill>
@@ -16655,7 +16639,7 @@
               </a:lnSpc>
             </a:pPr>
             <a:r>
-              <a:rPr sz="2049">
+              <a:rPr sz="2083">
                 <a:solidFill>
                   <a:srgbClr val="E6EAF2"/>
                 </a:solidFill>
@@ -16671,7 +16655,7 @@
               </a:lnSpc>
             </a:pPr>
             <a:r>
-              <a:rPr sz="2049">
+              <a:rPr sz="2083">
                 <a:solidFill>
                   <a:srgbClr val="E6EAF2"/>
                 </a:solidFill>
@@ -16687,7 +16671,7 @@
               </a:lnSpc>
             </a:pPr>
             <a:r>
-              <a:rPr sz="2049">
+              <a:rPr sz="2083">
                 <a:solidFill>
                   <a:srgbClr val="E6EAF2"/>
                 </a:solidFill>
@@ -16703,7 +16687,7 @@
               </a:lnSpc>
             </a:pPr>
             <a:r>
-              <a:rPr sz="2049">
+              <a:rPr sz="2083">
                 <a:solidFill>
                   <a:srgbClr val="E6EAF2"/>
                 </a:solidFill>
@@ -18038,7 +18022,7 @@
         <p:spPr>
           <a:xfrm>
             <a:off x="2926080" y="2377440"/>
-            <a:ext cx="12435840" cy="4933451"/>
+            <a:ext cx="12435840" cy="5344500"/>
           </a:xfrm>
           <a:prstGeom prst="roundRect">
             <a:avLst>
@@ -18084,7 +18068,7 @@
         <p:spPr>
           <a:xfrm>
             <a:off x="3383280" y="2743200"/>
-            <a:ext cx="11521440" cy="4201931"/>
+            <a:ext cx="11521440" cy="4612980"/>
           </a:xfrm>
           <a:prstGeom prst="rect">
             <a:avLst/>
@@ -18253,7 +18237,23 @@
                 </a:solidFill>
                 <a:latin typeface="Consolas"/>
               </a:rPr>
-              <a:t>multipass stop servidor    # libera RAM do notebook</a:t>
+              <a:t>kamal app stop             # para o app</a:t>
+            </a:r>
+          </a:p>
+          <a:p>
+            <a:pPr>
+              <a:lnSpc>
+                <a:spcPct val="125000"/>
+              </a:lnSpc>
+            </a:pPr>
+            <a:r>
+              <a:rPr sz="2232">
+                <a:solidFill>
+                  <a:srgbClr val="E6EAF2"/>
+                </a:solidFill>
+                <a:latin typeface="Consolas"/>
+              </a:rPr>
+              <a:t>kamal accessory stop db    # para o banco</a:t>
             </a:r>
           </a:p>
         </p:txBody>
@@ -18721,7 +18721,7 @@
                 <a:cs typeface="Open Sans Extra Bold"/>
                 <a:sym typeface="Open Sans Extra Bold"/>
               </a:rPr>
-              <a:t>Volume Docker NÃO é backup. Se a VM sumir, o volume some junto.</a:t>
+              <a:t>Volume Docker NÃO é backup.</a:t>
             </a:r>
           </a:p>
           <a:p>
@@ -18742,7 +18742,7 @@
                 <a:cs typeface="Open Sans Extra Bold"/>
                 <a:sym typeface="Open Sans Extra Bold"/>
               </a:rPr>
-              <a:t>E aqui a VM some com um multipass delete.</a:t>
+              <a:t>Um docker volume rm sem querer leva tudo junto.</a:t>
             </a:r>
           </a:p>
           <a:p>
@@ -18763,7 +18763,7 @@
                 <a:cs typeface="Open Sans Extra Bold"/>
                 <a:sym typeface="Open Sans Extra Bold"/>
               </a:rPr>
-              <a:t>demonstração barata de um susto caro</a:t>
+              <a:t>e a máquina que morre leva também</a:t>
             </a:r>
           </a:p>
           <a:p>
@@ -18784,7 +18784,7 @@
                 <a:cs typeface="Open Sans Extra Bold"/>
                 <a:sym typeface="Open Sans Extra Bold"/>
               </a:rPr>
-              <a:t>pg_dump pela SSH, compactado, guardado fora da máquina.</a:t>
+              <a:t>Backup é a cópia que vive FORA dali: pg_dump, compactado, em outro lugar.</a:t>
             </a:r>
           </a:p>
           <a:p>
@@ -19298,7 +19298,7 @@
                 <a:cs typeface="Open Sans Extra Bold"/>
                 <a:sym typeface="Open Sans Extra Bold"/>
               </a:rPr>
-              <a:t>curl https://seunome.test/...   -&gt;  FALHA: self signed certificate</a:t>
+              <a:t>curl https://seunome.test/...   -&gt;  FALHA: erro 60, self-signed</a:t>
             </a:r>
           </a:p>
           <a:p>
@@ -20855,7 +20855,7 @@
                 <a:cs typeface="Open Sans Extra Bold"/>
                 <a:sym typeface="Open Sans Extra Bold"/>
               </a:rPr>
-              <a:t>Faça um pg_dump pela SSH e confira que o arquivo não está vazio.</a:t>
+              <a:t>docker exec ... pg_dump ... | gzip: e confira que o arquivo não está vazio.</a:t>
             </a:r>
           </a:p>
           <a:p>
@@ -20876,7 +20876,7 @@
                 <a:cs typeface="Open Sans Extra Bold"/>
                 <a:sym typeface="Open Sans Extra Bold"/>
               </a:rPr>
-              <a:t>multipass stop servidor antes de ir embora.</a:t>
+              <a:t>kamal app stop e kamal accessory stop db liberam a máquina depois.</a:t>
             </a:r>
           </a:p>
           <a:p>

--- a/slides/build/aula-04-servidor-docker-kamal-e-deploy.pptx
+++ b/slides/build/aula-04-servidor-docker-kamal-e-deploy.pptx
@@ -10415,13 +10415,13 @@
           <a:p>
             <a:pPr algn="l" marL="1136378" indent="-568189" lvl="1">
               <a:lnSpc>
-                <a:spcPts val="3742"/>
+                <a:spcPts val="4989"/>
               </a:lnSpc>
               <a:buFont typeface="Arial"/>
               <a:buChar char="•"/>
             </a:pPr>
             <a:r>
-              <a:rPr lang="en-US" sz="2368">
+              <a:rPr lang="en-US" sz="3157">
                 <a:solidFill>
                   <a:srgbClr val="000000"/>
                 </a:solidFill>
@@ -10430,19 +10430,19 @@
                 <a:cs typeface="Open Sans Extra Bold"/>
                 <a:sym typeface="Open Sans Extra Bold"/>
               </a:rPr>
-              <a:t>rsync -aR do gabarito aula-04. O -R não é detalhe.</a:t>
+              <a:t>rsync -aR do gabarito aula-04, e bundle install.</a:t>
             </a:r>
           </a:p>
           <a:p>
             <a:pPr algn="l" marL="2272757" indent="-757586" lvl="2">
               <a:lnSpc>
-                <a:spcPts val="3742"/>
+                <a:spcPts val="4989"/>
               </a:lnSpc>
               <a:buFont typeface="Arial"/>
               <a:buChar char="◦"/>
             </a:pPr>
             <a:r>
-              <a:rPr lang="en-US" sz="2368">
+              <a:rPr lang="en-US" sz="3157">
                 <a:solidFill>
                   <a:srgbClr val="000000"/>
                 </a:solidFill>
@@ -10451,19 +10451,19 @@
                 <a:cs typeface="Open Sans Extra Bold"/>
                 <a:sym typeface="Open Sans Extra Bold"/>
               </a:rPr>
-              <a:t>sem ele, deploy.yml vai para a raiz e o Kamal não acha nada.</a:t>
+              <a:t>sem o -R, o deploy.yml vai pra raiz e o Kamal não acha nada</a:t>
             </a:r>
           </a:p>
           <a:p>
             <a:pPr algn="l" marL="1136378" indent="-568189" lvl="1">
               <a:lnSpc>
-                <a:spcPts val="3742"/>
+                <a:spcPts val="4989"/>
               </a:lnSpc>
               <a:buFont typeface="Arial"/>
               <a:buChar char="•"/>
             </a:pPr>
             <a:r>
-              <a:rPr lang="en-US" sz="2368">
+              <a:rPr lang="en-US" sz="3157">
                 <a:solidFill>
                   <a:srgbClr val="000000"/>
                 </a:solidFill>
@@ -10472,19 +10472,40 @@
                 <a:cs typeface="Open Sans Extra Bold"/>
                 <a:sym typeface="Open Sans Extra Bold"/>
               </a:rPr>
-              <a:t>bundle install</a:t>
+              <a:t>Crie o PAT (classic): write:packages e read:packages.</a:t>
+            </a:r>
+          </a:p>
+          <a:p>
+            <a:pPr algn="l" marL="2272757" indent="-757586" lvl="2">
+              <a:lnSpc>
+                <a:spcPts val="4989"/>
+              </a:lnSpc>
+              <a:buFont typeface="Arial"/>
+              <a:buChar char="◦"/>
+            </a:pPr>
+            <a:r>
+              <a:rPr lang="en-US" sz="3157">
+                <a:solidFill>
+                  <a:srgbClr val="000000"/>
+                </a:solidFill>
+                <a:latin typeface="Open Sans Extra Bold"/>
+                <a:ea typeface="Open Sans Extra Bold"/>
+                <a:cs typeface="Open Sans Extra Bold"/>
+                <a:sym typeface="Open Sans Extra Bold"/>
+              </a:rPr>
+              <a:t>ele aparece UMA VEZ. Guarde agora</a:t>
             </a:r>
           </a:p>
           <a:p>
             <a:pPr algn="l" marL="1136378" indent="-568189" lvl="1">
               <a:lnSpc>
-                <a:spcPts val="3742"/>
+                <a:spcPts val="4989"/>
               </a:lnSpc>
               <a:buFont typeface="Arial"/>
               <a:buChar char="•"/>
             </a:pPr>
             <a:r>
-              <a:rPr lang="en-US" sz="2368">
+              <a:rPr lang="en-US" sz="3157">
                 <a:solidFill>
                   <a:srgbClr val="000000"/>
                 </a:solidFill>
@@ -10493,82 +10514,19 @@
                 <a:cs typeface="Open Sans Extra Bold"/>
                 <a:sym typeface="Open Sans Extra Bold"/>
               </a:rPr>
-              <a:t>Crie o PAT (classic) no GitHub: write:packages e read:packages.</a:t>
+              <a:t>Confere: ls config/deploy.yml .kamal/secrets .env.example</a:t>
             </a:r>
           </a:p>
           <a:p>
             <a:pPr algn="l" marL="1136378" indent="-568189" lvl="1">
               <a:lnSpc>
-                <a:spcPts val="3742"/>
+                <a:spcPts val="4989"/>
               </a:lnSpc>
               <a:buFont typeface="Arial"/>
               <a:buChar char="•"/>
             </a:pPr>
             <a:r>
-              <a:rPr lang="en-US" sz="2368">
-                <a:solidFill>
-                  <a:srgbClr val="000000"/>
-                </a:solidFill>
-                <a:latin typeface="Open Sans Extra Bold"/>
-                <a:ea typeface="Open Sans Extra Bold"/>
-                <a:cs typeface="Open Sans Extra Bold"/>
-                <a:sym typeface="Open Sans Extra Bold"/>
-              </a:rPr>
-              <a:t>Ele é mostrado UMA VEZ. Guarde agora.</a:t>
-            </a:r>
-          </a:p>
-          <a:p>
-            <a:pPr algn="l" marL="1136378" indent="-568189" lvl="1">
-              <a:lnSpc>
-                <a:spcPts val="3742"/>
-              </a:lnSpc>
-              <a:buFont typeface="Arial"/>
-              <a:buChar char="•"/>
-            </a:pPr>
-            <a:r>
-              <a:rPr lang="en-US" sz="2368">
-                <a:solidFill>
-                  <a:srgbClr val="000000"/>
-                </a:solidFill>
-                <a:latin typeface="Open Sans Extra Bold"/>
-                <a:ea typeface="Open Sans Extra Bold"/>
-                <a:cs typeface="Open Sans Extra Bold"/>
-                <a:sym typeface="Open Sans Extra Bold"/>
-              </a:rPr>
-              <a:t>Confere: ls config/deploy.yml .kamal/secrets .env.example</a:t>
-            </a:r>
-          </a:p>
-          <a:p>
-            <a:pPr algn="l" marL="1136378" indent="-568189" lvl="1">
-              <a:lnSpc>
-                <a:spcPts val="3742"/>
-              </a:lnSpc>
-              <a:buFont typeface="Arial"/>
-              <a:buChar char="•"/>
-            </a:pPr>
-            <a:r>
-              <a:rPr lang="en-US" sz="2368">
-                <a:solidFill>
-                  <a:srgbClr val="000000"/>
-                </a:solidFill>
-                <a:latin typeface="Open Sans Extra Bold"/>
-                <a:ea typeface="Open Sans Extra Bold"/>
-                <a:cs typeface="Open Sans Extra Bold"/>
-                <a:sym typeface="Open Sans Extra Bold"/>
-              </a:rPr>
-              <a:t>E uname -m para saber a sua arquitetura: x86_64 é amd64, aarch64 é arm64.</a:t>
-            </a:r>
-          </a:p>
-          <a:p>
-            <a:pPr algn="l" marL="1136378" indent="-568189" lvl="1">
-              <a:lnSpc>
-                <a:spcPts val="3742"/>
-              </a:lnSpc>
-              <a:buFont typeface="Arial"/>
-              <a:buChar char="•"/>
-            </a:pPr>
-            <a:r>
-              <a:rPr lang="en-US" sz="2368">
+              <a:rPr lang="en-US" sz="3157">
                 <a:solidFill>
                   <a:srgbClr val="000000"/>
                 </a:solidFill>
@@ -21076,13 +21034,13 @@
           <a:p>
             <a:pPr algn="l" marL="1136378" indent="-568189" lvl="1">
               <a:lnSpc>
-                <a:spcPts val="3742"/>
+                <a:spcPts val="4573"/>
               </a:lnSpc>
               <a:buFont typeface="Arial"/>
               <a:buChar char="•"/>
             </a:pPr>
             <a:r>
-              <a:rPr lang="en-US" sz="2368">
+              <a:rPr lang="en-US" sz="2894">
                 <a:solidFill>
                   <a:srgbClr val="000000"/>
                 </a:solidFill>
@@ -21091,19 +21049,19 @@
                 <a:cs typeface="Open Sans Extra Bold"/>
                 <a:sym typeface="Open Sans Extra Bold"/>
               </a:rPr>
-              <a:t>Publicar não é rodar noutro lugar: é empacotar, versionar e poder voltar atrás.</a:t>
+              <a:t>Publicar é empacotar, versionar, e poder voltar atrás.</a:t>
             </a:r>
           </a:p>
           <a:p>
             <a:pPr algn="l" marL="1136378" indent="-568189" lvl="1">
               <a:lnSpc>
-                <a:spcPts val="3742"/>
+                <a:spcPts val="4573"/>
               </a:lnSpc>
               <a:buFont typeface="Arial"/>
               <a:buChar char="•"/>
             </a:pPr>
             <a:r>
-              <a:rPr lang="en-US" sz="2368">
+              <a:rPr lang="en-US" sz="2894">
                 <a:solidFill>
                   <a:srgbClr val="000000"/>
                 </a:solidFill>
@@ -21118,13 +21076,13 @@
           <a:p>
             <a:pPr algn="l" marL="1136378" indent="-568189" lvl="1">
               <a:lnSpc>
-                <a:spcPts val="3742"/>
+                <a:spcPts val="4573"/>
               </a:lnSpc>
               <a:buFont typeface="Arial"/>
               <a:buChar char="•"/>
             </a:pPr>
             <a:r>
-              <a:rPr lang="en-US" sz="2368">
+              <a:rPr lang="en-US" sz="2894">
                 <a:solidFill>
                   <a:srgbClr val="000000"/>
                 </a:solidFill>
@@ -21133,19 +21091,19 @@
                 <a:cs typeface="Open Sans Extra Bold"/>
                 <a:sym typeface="Open Sans Extra Bold"/>
               </a:rPr>
-              <a:t>Multi-stage e usuário não-root.</a:t>
+              <a:t>Multi-stage, e usuário não-root.</a:t>
             </a:r>
           </a:p>
           <a:p>
             <a:pPr algn="l" marL="1136378" indent="-568189" lvl="1">
               <a:lnSpc>
-                <a:spcPts val="3742"/>
+                <a:spcPts val="4573"/>
               </a:lnSpc>
               <a:buFont typeface="Arial"/>
               <a:buChar char="•"/>
             </a:pPr>
             <a:r>
-              <a:rPr lang="en-US" sz="2368">
+              <a:rPr lang="en-US" sz="2894">
                 <a:solidFill>
                   <a:srgbClr val="000000"/>
                 </a:solidFill>
@@ -21160,13 +21118,13 @@
           <a:p>
             <a:pPr algn="l" marL="1136378" indent="-568189" lvl="1">
               <a:lnSpc>
-                <a:spcPts val="3742"/>
+                <a:spcPts val="4573"/>
               </a:lnSpc>
               <a:buFont typeface="Arial"/>
               <a:buChar char="•"/>
             </a:pPr>
             <a:r>
-              <a:rPr lang="en-US" sz="2368">
+              <a:rPr lang="en-US" sz="2894">
                 <a:solidFill>
                   <a:srgbClr val="000000"/>
                 </a:solidFill>
@@ -21181,13 +21139,13 @@
           <a:p>
             <a:pPr algn="l" marL="1136378" indent="-568189" lvl="1">
               <a:lnSpc>
-                <a:spcPts val="3742"/>
+                <a:spcPts val="4573"/>
               </a:lnSpc>
               <a:buFont typeface="Arial"/>
               <a:buChar char="•"/>
             </a:pPr>
             <a:r>
-              <a:rPr lang="en-US" sz="2368">
+              <a:rPr lang="en-US" sz="2894">
                 <a:solidFill>
                   <a:srgbClr val="000000"/>
                 </a:solidFill>
@@ -21202,13 +21160,13 @@
           <a:p>
             <a:pPr algn="l" marL="1136378" indent="-568189" lvl="1">
               <a:lnSpc>
-                <a:spcPts val="3742"/>
+                <a:spcPts val="4573"/>
               </a:lnSpc>
               <a:buFont typeface="Arial"/>
               <a:buChar char="•"/>
             </a:pPr>
             <a:r>
-              <a:rPr lang="en-US" sz="2368">
+              <a:rPr lang="en-US" sz="2894">
                 <a:solidFill>
                   <a:srgbClr val="000000"/>
                 </a:solidFill>
@@ -21217,28 +21175,7 @@
                 <a:cs typeface="Open Sans Extra Bold"/>
                 <a:sym typeface="Open Sans Extra Bold"/>
               </a:rPr>
-              <a:t>CI é o portão: te avisa antes, com ou sem deploy automático.</a:t>
-            </a:r>
-          </a:p>
-          <a:p>
-            <a:pPr algn="l" marL="1136378" indent="-568189" lvl="1">
-              <a:lnSpc>
-                <a:spcPts val="3742"/>
-              </a:lnSpc>
-              <a:buFont typeface="Arial"/>
-              <a:buChar char="•"/>
-            </a:pPr>
-            <a:r>
-              <a:rPr lang="en-US" sz="2368">
-                <a:solidFill>
-                  <a:srgbClr val="000000"/>
-                </a:solidFill>
-                <a:latin typeface="Open Sans Extra Bold"/>
-                <a:ea typeface="Open Sans Extra Bold"/>
-                <a:cs typeface="Open Sans Extra Bold"/>
-                <a:sym typeface="Open Sans Extra Bold"/>
-              </a:rPr>
-              <a:t>Numa máquina exposta, provisionar direito e o firewall deixam de ser detalhe.</a:t>
+              <a:t>CI é o portão: avisa antes, com ou sem deploy automático.</a:t>
             </a:r>
           </a:p>
         </p:txBody>

--- a/slides/build/aula-04-servidor-docker-kamal-e-deploy.pptx
+++ b/slides/build/aula-04-servidor-docker-kamal-e-deploy.pptx
@@ -8231,7 +8231,7 @@
                 <a:cs typeface="Open Sans Extra Bold"/>
                 <a:sym typeface="Open Sans Extra Bold"/>
               </a:rPr>
-              <a:t>Confere, e é o que o Kamal precisa:</a:t>
+              <a:t>VOCÊ DEVE VER, e é o que o Kamal precisa:</a:t>
             </a:r>
           </a:p>
           <a:p>
@@ -10514,7 +10514,7 @@
                 <a:cs typeface="Open Sans Extra Bold"/>
                 <a:sym typeface="Open Sans Extra Bold"/>
               </a:rPr>
-              <a:t>Confere: ls config/deploy.yml .kamal/secrets .env.example</a:t>
+              <a:t>VOCÊ DEVE VER: ls config/deploy.yml .kamal/secrets .env.example</a:t>
             </a:r>
           </a:p>
           <a:p>
@@ -14030,7 +14030,7 @@
                 <a:cs typeface="Open Sans Extra Bold"/>
                 <a:sym typeface="Open Sans Extra Bold"/>
               </a:rPr>
-              <a:t>Confere: git status NÃO pode mostrar o .env.</a:t>
+              <a:t>VOCÊ DEVE VER: git status NÃO pode mostrar o .env.</a:t>
             </a:r>
           </a:p>
           <a:p>
@@ -14051,7 +14051,7 @@
                 <a:cs typeface="Open Sans Extra Bold"/>
                 <a:sym typeface="Open Sans Extra Bold"/>
               </a:rPr>
-              <a:t>Confere: bundle exec kamal config roda sem erro.</a:t>
+              <a:t>VOCÊ DEVE VER: bundle exec kamal config roda sem erro.</a:t>
             </a:r>
           </a:p>
           <a:p>
@@ -16862,7 +16862,7 @@
                 <a:cs typeface="Open Sans Extra Bold"/>
                 <a:sym typeface="Open Sans Extra Bold"/>
               </a:rPr>
-              <a:t>Confere: getent hosts seunome.test devolve o IP da VM.</a:t>
+              <a:t>VOCÊ DEVE VER: getent hosts seunome.test devolve o IP da VM.</a:t>
             </a:r>
           </a:p>
           <a:p>
@@ -19020,7 +19020,7 @@
                 <a:cs typeface="Open Sans Extra Bold"/>
                 <a:sym typeface="Open Sans Extra Bold"/>
               </a:rPr>
-              <a:t>Confere: curl --cacert tls/capacita-cert.pem https://seunome.test/...</a:t>
+              <a:t>VOCÊ DEVE VER: curl --cacert tls/capacita-cert.pem https://seunome.test/...</a:t>
             </a:r>
           </a:p>
           <a:p>
@@ -20813,7 +20813,7 @@
                 <a:cs typeface="Open Sans Extra Bold"/>
                 <a:sym typeface="Open Sans Extra Bold"/>
               </a:rPr>
-              <a:t>docker exec ... pg_dump ... | gzip: e confira que o arquivo não está vazio.</a:t>
+              <a:t>docker exec ... pg_dump ... | gzip  -&gt;  ls -lh: alguns KB, não 20 bytes.</a:t>
             </a:r>
           </a:p>
           <a:p>

--- a/slides/build/aula-04-servidor-docker-kamal-e-deploy.pptx
+++ b/slides/build/aula-04-servidor-docker-kamal-e-deploy.pptx
@@ -21946,7 +21946,7 @@
                 <a:cs typeface="Open Sans Extra Bold"/>
                 <a:sym typeface="Open Sans Extra Bold"/>
               </a:rPr>
-              <a:t>Uma API REST com cinco fluxos de autenticação. Testada.</a:t>
+              <a:t>Uma API REST com cinco fluxos de autenticação. 71 testes verdes.</a:t>
             </a:r>
           </a:p>
           <a:p>
@@ -21988,7 +21988,7 @@
                 <a:cs typeface="Open Sans Extra Bold"/>
                 <a:sym typeface="Open Sans Extra Bold"/>
               </a:rPr>
-              <a:t>Um servidor Linux provisionado por vocês: firewall, Docker, SSH.</a:t>
+              <a:t>A própria máquina virou servidor: sshd, chave, e o Kamal entrando por SSH.</a:t>
             </a:r>
           </a:p>
           <a:p>
@@ -22009,7 +22009,7 @@
                 <a:cs typeface="Open Sans Extra Bold"/>
                 <a:sym typeface="Open Sans Extra Bold"/>
               </a:rPr>
-              <a:t>Deploy com zero-downtime, HTTPS, banco com volume e backup.</a:t>
+              <a:t>A API empacotada em Docker e publicada num registry.</a:t>
             </a:r>
           </a:p>
           <a:p>
@@ -22030,7 +22030,7 @@
                 <a:cs typeface="Open Sans Extra Bold"/>
                 <a:sym typeface="Open Sans Extra Bold"/>
               </a:rPr>
-              <a:t>Do zero. Em quatro encontros.</a:t>
+              <a:t>HTTPS, zero-downtime, rollback, banco com volume, e backup.</a:t>
             </a:r>
           </a:p>
           <a:p>
@@ -22051,7 +22051,7 @@
                 <a:cs typeface="Open Sans Extra Bold"/>
                 <a:sym typeface="Open Sans Extra Bold"/>
               </a:rPr>
-              <a:t>Está tudo no GitHub de vocês. É portfólio.</a:t>
+              <a:t>Do zero. Em quatro encontros. E está no GitHub de vocês.</a:t>
             </a:r>
           </a:p>
         </p:txBody>
@@ -22308,7 +22308,7 @@
                 <a:cs typeface="Open Sans Extra Bold"/>
                 <a:sym typeface="Open Sans Extra Bold"/>
               </a:rPr>
-              <a:t>e o deploy.yml é o mesmo. Muda uma variável.</a:t>
+              <a:t>o deploy.yml é o mesmo: mudam DUAS linhas do .env.</a:t>
             </a:r>
           </a:p>
           <a:p>
